--- a/RedBull_XAlps_2025_Dashboard.pptx
+++ b/RedBull_XAlps_2025_Dashboard.pptx
@@ -5866,7 +5866,7 @@
               </a:defRPr>
             </a:pPr>
             <a:r>
-              <a:t>Output: 294K tracks + 59K climb + 62K wind</a:t>
+              <a:t>Output: 294K tracks + 46K thermals + 62K wind</a:t>
             </a:r>
           </a:p>
           <a:p>
@@ -5882,7 +5882,7 @@
               </a:defRPr>
             </a:pPr>
             <a:r>
-              <a:t>File size reduced: 25 MB &gt; 17 MB</a:t>
+              <a:t>File size: 18 MB (gzipped ~5MB over network)</a:t>
             </a:r>
           </a:p>
           <a:p>
@@ -7934,7 +7934,7 @@
               </a:defRPr>
             </a:pPr>
             <a:r>
-              <a:t>Filter: Vertical Speed &gt; 1.0 m/s</a:t>
+              <a:t>Filter: Vertical Speed &gt; 1.0 m/s AND UserActivity = Flying</a:t>
             </a:r>
           </a:p>
           <a:p>
@@ -7998,7 +7998,7 @@
               </a:defRPr>
             </a:pPr>
             <a:r>
-              <a:t>UserActivity field NOT checked (may include hiking)</a:t>
+              <a:t>Hiking-uphill false positives eliminated by activity filter</a:t>
             </a:r>
           </a:p>
           <a:p>
@@ -8771,7 +8771,7 @@
               </a:defRPr>
             </a:pPr>
             <a:r>
-              <a:t>3D Race Replay</a:t>
+              <a:t>Live Race Positions</a:t>
             </a:r>
           </a:p>
         </p:txBody>
@@ -8807,7 +8807,7 @@
               </a:defRPr>
             </a:pPr>
             <a:r>
-              <a:t>Animated athlete markers moving along GPS tracks over Alpine terrain with real-time interpolation</a:t>
+              <a:t>Dynamic ranking by westward progress. Position numbers on markers update in real-time as athletes overtake</a:t>
             </a:r>
           </a:p>
         </p:txBody>
@@ -8929,7 +8929,7 @@
               </a:defRPr>
             </a:pPr>
             <a:r>
-              <a:t>Numbered Markers</a:t>
+              <a:t>Activity Shape Markers</a:t>
             </a:r>
           </a:p>
         </p:txBody>
@@ -8965,7 +8965,7 @@
               </a:defRPr>
             </a:pPr>
             <a:r>
-              <a:t>Each athlete shows their bib number in a colored circle with callout line to terrain</a:t>
+              <a:t>Triangle = Flying, Circle = Hiking/Resting. Shapes change dynamically with athlete activity status</a:t>
             </a:r>
           </a:p>
         </p:txBody>
@@ -9087,7 +9087,7 @@
               </a:defRPr>
             </a:pPr>
             <a:r>
-              <a:t>Track Lines</a:t>
+              <a:t>Athlete Roster</a:t>
             </a:r>
           </a:p>
         </p:txBody>
@@ -9123,7 +9123,7 @@
               </a:defRPr>
             </a:pPr>
             <a:r>
-              <a:t>Dual-layer glow effect: translucent outer + bright inner core at actual GPS altitude</a:t>
+              <a:t>35 named athletes with flags, countries. Sidebar shows groundspeed, altitude, activity status, live position</a:t>
             </a:r>
           </a:p>
         </p:txBody>
@@ -9281,7 +9281,7 @@
               </a:defRPr>
             </a:pPr>
             <a:r>
-              <a:t>Canvas-drawn polar diagram with 16 directions, 4 speed bins, live stats</a:t>
+              <a:t>Canvas-drawn polar diagram with 16 directions, 4 speed bins, live stats. Updates during playback</a:t>
             </a:r>
           </a:p>
         </p:txBody>
@@ -9439,7 +9439,7 @@
               </a:defRPr>
             </a:pPr>
             <a:r>
-              <a:t>Active count, average and max climb rate, updating every 500ms during playback</a:t>
+              <a:t>Active count, avg/max climb rate. Flying-only filter eliminates hiking false positives</a:t>
             </a:r>
           </a:p>
         </p:txBody>
@@ -9597,7 +9597,7 @@
               </a:defRPr>
             </a:pPr>
             <a:r>
-              <a:t>Sparkline elevation chart for solo'd athlete with moving time marker</a:t>
+              <a:t>Sparkline elevation chart for solo'd athlete with moving red time marker</a:t>
             </a:r>
           </a:p>
         </p:txBody>
@@ -9755,7 +9755,7 @@
               </a:defRPr>
             </a:pPr>
             <a:r>
-              <a:t>Filter all data to a single athlete: tracks, climb events, wind, altitude profile</a:t>
+              <a:t>Filter all data to a single athlete: tracks, thermals, wind rose, altitude profile</a:t>
             </a:r>
           </a:p>
         </p:txBody>
@@ -9818,7 +9818,7 @@
             <a:avLst/>
           </a:prstGeom>
           <a:solidFill>
-            <a:srgbClr val="FFD700"/>
+            <a:srgbClr val="0079C1"/>
           </a:solidFill>
           <a:ln>
             <a:noFill/>
@@ -9877,7 +9877,7 @@
               </a:defRPr>
             </a:pPr>
             <a:r>
-              <a:t>Dynamic Lighting</a:t>
+              <a:t>Calcite Design + Mobile</a:t>
             </a:r>
           </a:p>
         </p:txBody>
@@ -9913,7 +9913,7 @@
               </a:defRPr>
             </a:pPr>
             <a:r>
-              <a:t>Sun position updates with playback time for realistic day/night transitions</a:t>
+              <a:t>Full Calcite Design System with dark mode. Responsive layout for desktop, tablet, and mobile</a:t>
             </a:r>
           </a:p>
         </p:txBody>
@@ -10360,7 +10360,7 @@
               </a:defRPr>
             </a:pPr>
             <a:r>
-              <a:t>Animation: only positions + time display per frame</a:t>
+              <a:t>Symbol cache keyed by position+color+activity</a:t>
             </a:r>
           </a:p>
           <a:p>
@@ -10377,22 +10377,6 @@
             </a:pPr>
             <a:r>
               <a:t>90-second time buckets reduce data 3x</a:t>
-            </a:r>
-          </a:p>
-          <a:p>
-            <a:pPr>
-              <a:spcAft>
-                <a:spcPts val="800"/>
-              </a:spcAft>
-              <a:defRPr sz="1300">
-                <a:solidFill>
-                  <a:srgbClr val="AAAABB"/>
-                </a:solidFill>
-                <a:latin typeface="Segoe UI"/>
-              </a:defRPr>
-            </a:pPr>
-            <a:r>
-              <a:t>4 decimal coordinate precision saves ~30% JSON size</a:t>
             </a:r>
           </a:p>
           <a:p>
